--- a/presentations/research-device-naming/Research_Device_Naming_Narrated.pptx
+++ b/presentations/research-device-naming/Research_Device_Naming_Narrated.pptx
@@ -173,7 +173,7 @@
     </p:spTree>
     <p:extLst>
       <p:ext uri="{BB962C8B-B14F-4D97-AF65-F5344CB8AC3E}">
-        <p14:creationId xmlns:p14="http://schemas.microsoft.com/office/powerpoint/2010/main" val="2794551284"/>
+        <p14:creationId xmlns:p14="http://schemas.microsoft.com/office/powerpoint/2010/main" val="1398211440"/>
       </p:ext>
     </p:extLst>
   </p:cSld>
@@ -2419,7 +2419,7 @@
             <a:hlinkClick r:id="" action="ppaction://media"/>
             <a:extLst>
               <a:ext uri="{FF2B5EF4-FFF2-40B4-BE49-F238E27FC236}">
-                <a16:creationId xmlns:a16="http://schemas.microsoft.com/office/drawing/2014/main" id="{51065D1F-9D93-EEED-9578-E88F14D3237A}"/>
+                <a16:creationId xmlns:a16="http://schemas.microsoft.com/office/drawing/2014/main" id="{1A8F4B86-B442-B846-0564-880585FC2318}"/>
               </a:ext>
             </a:extLst>
           </p:cNvPr>
@@ -2435,7 +2435,7 @@
                     <p:ext uri="{3AFAAA56-56D3-431D-BCD4-E75A35582382}">
                       <p173:tracksInfo xmlns:p173="http://schemas.microsoft.com/office/powerpoint/2017/3/main" displayLoc="slide">
                         <p173:trackLst>
-                          <p173:track id="{C6A07E1B-68F8-4C94-873D-76EA3A52A122}" label="English (captions)" lang="en-US" r:embed="rId6"/>
+                          <p173:track id="{2A78D8FB-F803-4FBF-9DD7-D8983B74D043}" label="English (captions)" lang="en-US" r:embed="rId6"/>
                         </p173:trackLst>
                       </p173:tracksInfo>
                     </p:ext>
@@ -2453,7 +2453,7 @@
         </p:blipFill>
         <p:spPr>
           <a:xfrm>
-            <a:off x="127000" y="6350000"/>
+            <a:off x="12446000" y="127000"/>
             <a:ext cx="304800" cy="304800"/>
           </a:xfrm>
           <a:prstGeom prst="rect">
@@ -3465,7 +3465,7 @@
             <a:hlinkClick r:id="" action="ppaction://media"/>
             <a:extLst>
               <a:ext uri="{FF2B5EF4-FFF2-40B4-BE49-F238E27FC236}">
-                <a16:creationId xmlns:a16="http://schemas.microsoft.com/office/drawing/2014/main" id="{F6A344B1-DAE1-8A15-D7D2-251D3F9E6EA2}"/>
+                <a16:creationId xmlns:a16="http://schemas.microsoft.com/office/drawing/2014/main" id="{6DD2C05E-F5BD-BD6C-C972-0C4F64041B39}"/>
               </a:ext>
             </a:extLst>
           </p:cNvPr>
@@ -3481,7 +3481,7 @@
                     <p:ext uri="{3AFAAA56-56D3-431D-BCD4-E75A35582382}">
                       <p173:tracksInfo xmlns:p173="http://schemas.microsoft.com/office/powerpoint/2017/3/main" displayLoc="slide">
                         <p173:trackLst>
-                          <p173:track id="{68BFBCE9-BE26-4C13-B591-CE35BBA5841B}" label="English (captions)" lang="en-US" r:embed="rId10"/>
+                          <p173:track id="{CD5B8693-E57C-4369-8F71-8EEBAAECD226}" label="English (captions)" lang="en-US" r:embed="rId10"/>
                         </p173:trackLst>
                       </p173:tracksInfo>
                     </p:ext>
@@ -3499,7 +3499,7 @@
         </p:blipFill>
         <p:spPr>
           <a:xfrm>
-            <a:off x="127000" y="6350000"/>
+            <a:off x="12446000" y="127000"/>
             <a:ext cx="304800" cy="304800"/>
           </a:xfrm>
           <a:prstGeom prst="rect">
@@ -5755,7 +5755,7 @@
             <a:hlinkClick r:id="" action="ppaction://media"/>
             <a:extLst>
               <a:ext uri="{FF2B5EF4-FFF2-40B4-BE49-F238E27FC236}">
-                <a16:creationId xmlns:a16="http://schemas.microsoft.com/office/drawing/2014/main" id="{CB8520D3-9B2C-A70D-D5A3-96F974DF3B48}"/>
+                <a16:creationId xmlns:a16="http://schemas.microsoft.com/office/drawing/2014/main" id="{568843E7-FCC9-4CA7-D1B2-5905FEBBD14A}"/>
               </a:ext>
             </a:extLst>
           </p:cNvPr>
@@ -5771,7 +5771,7 @@
                     <p:ext uri="{3AFAAA56-56D3-431D-BCD4-E75A35582382}">
                       <p173:tracksInfo xmlns:p173="http://schemas.microsoft.com/office/powerpoint/2017/3/main" displayLoc="slide">
                         <p173:trackLst>
-                          <p173:track id="{C1E0A2F3-8785-4F81-B48D-FB3900E85E32}" label="English (captions)" lang="en-US" r:embed="rId6"/>
+                          <p173:track id="{A38A62F6-A11D-4909-951B-761EC10A8773}" label="English (captions)" lang="en-US" r:embed="rId6"/>
                         </p173:trackLst>
                       </p173:tracksInfo>
                     </p:ext>
@@ -5789,7 +5789,7 @@
         </p:blipFill>
         <p:spPr>
           <a:xfrm>
-            <a:off x="127000" y="6350000"/>
+            <a:off x="12446000" y="127000"/>
             <a:ext cx="304800" cy="304800"/>
           </a:xfrm>
           <a:prstGeom prst="rect">
@@ -6669,7 +6669,7 @@
             <a:hlinkClick r:id="" action="ppaction://media"/>
             <a:extLst>
               <a:ext uri="{FF2B5EF4-FFF2-40B4-BE49-F238E27FC236}">
-                <a16:creationId xmlns:a16="http://schemas.microsoft.com/office/drawing/2014/main" id="{AC259B1F-B4AD-F315-8FE2-CA482E76D6D4}"/>
+                <a16:creationId xmlns:a16="http://schemas.microsoft.com/office/drawing/2014/main" id="{3876E9B7-32AB-6E54-DC23-02C61C478FA7}"/>
               </a:ext>
             </a:extLst>
           </p:cNvPr>
@@ -6685,7 +6685,7 @@
                     <p:ext uri="{3AFAAA56-56D3-431D-BCD4-E75A35582382}">
                       <p173:tracksInfo xmlns:p173="http://schemas.microsoft.com/office/powerpoint/2017/3/main" displayLoc="slide">
                         <p173:trackLst>
-                          <p173:track id="{1E4AB0C2-764B-410B-8D23-6D376350153E}" label="English (captions)" lang="en-US" r:embed="rId6"/>
+                          <p173:track id="{73EC77FE-9570-4F11-9172-271319E8157F}" label="English (captions)" lang="en-US" r:embed="rId6"/>
                         </p173:trackLst>
                       </p173:tracksInfo>
                     </p:ext>
@@ -6703,7 +6703,7 @@
         </p:blipFill>
         <p:spPr>
           <a:xfrm>
-            <a:off x="127000" y="6350000"/>
+            <a:off x="12446000" y="127000"/>
             <a:ext cx="304800" cy="304800"/>
           </a:xfrm>
           <a:prstGeom prst="rect">
@@ -7503,7 +7503,7 @@
             <a:hlinkClick r:id="" action="ppaction://media"/>
             <a:extLst>
               <a:ext uri="{FF2B5EF4-FFF2-40B4-BE49-F238E27FC236}">
-                <a16:creationId xmlns:a16="http://schemas.microsoft.com/office/drawing/2014/main" id="{502D0E3F-BE11-5748-1153-6487ECE506D4}"/>
+                <a16:creationId xmlns:a16="http://schemas.microsoft.com/office/drawing/2014/main" id="{1533B198-12E4-97AE-6062-55CF0104DC09}"/>
               </a:ext>
             </a:extLst>
           </p:cNvPr>
@@ -7519,7 +7519,7 @@
                     <p:ext uri="{3AFAAA56-56D3-431D-BCD4-E75A35582382}">
                       <p173:tracksInfo xmlns:p173="http://schemas.microsoft.com/office/powerpoint/2017/3/main" displayLoc="slide">
                         <p173:trackLst>
-                          <p173:track id="{8383C23E-AF3F-4BAB-8D9B-A7537BD20FFC}" label="English (captions)" lang="en-US" r:embed="rId6"/>
+                          <p173:track id="{145CFBD2-38FD-49FA-B93B-2A910F633507}" label="English (captions)" lang="en-US" r:embed="rId6"/>
                         </p173:trackLst>
                       </p173:tracksInfo>
                     </p:ext>
@@ -7537,7 +7537,7 @@
         </p:blipFill>
         <p:spPr>
           <a:xfrm>
-            <a:off x="127000" y="6350000"/>
+            <a:off x="12446000" y="127000"/>
             <a:ext cx="304800" cy="304800"/>
           </a:xfrm>
           <a:prstGeom prst="rect">
@@ -8723,7 +8723,7 @@
             <a:hlinkClick r:id="" action="ppaction://media"/>
             <a:extLst>
               <a:ext uri="{FF2B5EF4-FFF2-40B4-BE49-F238E27FC236}">
-                <a16:creationId xmlns:a16="http://schemas.microsoft.com/office/drawing/2014/main" id="{D19FE12C-8F68-DBC1-0634-98FEC5CA370E}"/>
+                <a16:creationId xmlns:a16="http://schemas.microsoft.com/office/drawing/2014/main" id="{D7782C93-4339-BA43-DBFA-769450AC03AC}"/>
               </a:ext>
             </a:extLst>
           </p:cNvPr>
@@ -8739,7 +8739,7 @@
                     <p:ext uri="{3AFAAA56-56D3-431D-BCD4-E75A35582382}">
                       <p173:tracksInfo xmlns:p173="http://schemas.microsoft.com/office/powerpoint/2017/3/main" displayLoc="slide">
                         <p173:trackLst>
-                          <p173:track id="{B43D7964-921E-44F7-8381-6FC8EDD439B9}" label="English (captions)" lang="en-US" r:embed="rId7"/>
+                          <p173:track id="{84DE643C-ACE6-4247-8F2F-5E6B5B8C7971}" label="English (captions)" lang="en-US" r:embed="rId7"/>
                         </p173:trackLst>
                       </p173:tracksInfo>
                     </p:ext>
@@ -8757,7 +8757,7 @@
         </p:blipFill>
         <p:spPr>
           <a:xfrm>
-            <a:off x="127000" y="6350000"/>
+            <a:off x="12446000" y="127000"/>
             <a:ext cx="304800" cy="304800"/>
           </a:xfrm>
           <a:prstGeom prst="rect">
@@ -11013,7 +11013,7 @@
             <a:hlinkClick r:id="" action="ppaction://media"/>
             <a:extLst>
               <a:ext uri="{FF2B5EF4-FFF2-40B4-BE49-F238E27FC236}">
-                <a16:creationId xmlns:a16="http://schemas.microsoft.com/office/drawing/2014/main" id="{B771A66E-AAE5-477E-5036-71B4BE0C5962}"/>
+                <a16:creationId xmlns:a16="http://schemas.microsoft.com/office/drawing/2014/main" id="{D219051A-4E3D-E831-7E6D-9C72B67DDA53}"/>
               </a:ext>
             </a:extLst>
           </p:cNvPr>
@@ -11029,7 +11029,7 @@
                     <p:ext uri="{3AFAAA56-56D3-431D-BCD4-E75A35582382}">
                       <p173:tracksInfo xmlns:p173="http://schemas.microsoft.com/office/powerpoint/2017/3/main" displayLoc="slide">
                         <p173:trackLst>
-                          <p173:track id="{0C9AC60A-FE75-4B80-92C8-D97B3252256C}" label="English (captions)" lang="en-US" r:embed="rId6"/>
+                          <p173:track id="{64411A12-E480-4B2B-AAFA-A008CBB3CC7C}" label="English (captions)" lang="en-US" r:embed="rId6"/>
                         </p173:trackLst>
                       </p173:tracksInfo>
                     </p:ext>
@@ -11047,7 +11047,7 @@
         </p:blipFill>
         <p:spPr>
           <a:xfrm>
-            <a:off x="127000" y="6350000"/>
+            <a:off x="12446000" y="127000"/>
             <a:ext cx="304800" cy="304800"/>
           </a:xfrm>
           <a:prstGeom prst="rect">
@@ -12458,7 +12458,7 @@
             <a:hlinkClick r:id="" action="ppaction://media"/>
             <a:extLst>
               <a:ext uri="{FF2B5EF4-FFF2-40B4-BE49-F238E27FC236}">
-                <a16:creationId xmlns:a16="http://schemas.microsoft.com/office/drawing/2014/main" id="{B158B27B-8E34-190D-9044-2F2B4980910E}"/>
+                <a16:creationId xmlns:a16="http://schemas.microsoft.com/office/drawing/2014/main" id="{E81DC8CC-C78A-A97B-C100-97364CAF36CF}"/>
               </a:ext>
             </a:extLst>
           </p:cNvPr>
@@ -12474,7 +12474,7 @@
                     <p:ext uri="{3AFAAA56-56D3-431D-BCD4-E75A35582382}">
                       <p173:tracksInfo xmlns:p173="http://schemas.microsoft.com/office/powerpoint/2017/3/main" displayLoc="slide">
                         <p173:trackLst>
-                          <p173:track id="{5AE95387-F70E-4FD4-8D72-E4309B74F331}" label="English (captions)" lang="en-US" r:embed="rId7"/>
+                          <p173:track id="{DA6510CB-7AEC-48B8-9F85-D058CA9440D9}" label="English (captions)" lang="en-US" r:embed="rId7"/>
                         </p173:trackLst>
                       </p173:tracksInfo>
                     </p:ext>
@@ -12492,7 +12492,7 @@
         </p:blipFill>
         <p:spPr>
           <a:xfrm>
-            <a:off x="127000" y="6350000"/>
+            <a:off x="12446000" y="127000"/>
             <a:ext cx="304800" cy="304800"/>
           </a:xfrm>
           <a:prstGeom prst="rect">
@@ -13717,7 +13717,7 @@
             <a:hlinkClick r:id="" action="ppaction://media"/>
             <a:extLst>
               <a:ext uri="{FF2B5EF4-FFF2-40B4-BE49-F238E27FC236}">
-                <a16:creationId xmlns:a16="http://schemas.microsoft.com/office/drawing/2014/main" id="{91022870-C9C4-E3B1-27BA-34A1A1CD1D5C}"/>
+                <a16:creationId xmlns:a16="http://schemas.microsoft.com/office/drawing/2014/main" id="{27913740-82D3-8687-AAD1-2C06885880D7}"/>
               </a:ext>
             </a:extLst>
           </p:cNvPr>
@@ -13733,7 +13733,7 @@
                     <p:ext uri="{3AFAAA56-56D3-431D-BCD4-E75A35582382}">
                       <p173:tracksInfo xmlns:p173="http://schemas.microsoft.com/office/powerpoint/2017/3/main" displayLoc="slide">
                         <p173:trackLst>
-                          <p173:track id="{FD54FECB-A9AA-46D4-A389-404A6DA88140}" label="English (captions)" lang="en-US" r:embed="rId6"/>
+                          <p173:track id="{F85DC5DB-5D32-4DC8-AC5C-39791F39A64D}" label="English (captions)" lang="en-US" r:embed="rId6"/>
                         </p173:trackLst>
                       </p173:tracksInfo>
                     </p:ext>
@@ -13751,7 +13751,7 @@
         </p:blipFill>
         <p:spPr>
           <a:xfrm>
-            <a:off x="127000" y="6350000"/>
+            <a:off x="12446000" y="127000"/>
             <a:ext cx="304800" cy="304800"/>
           </a:xfrm>
           <a:prstGeom prst="rect">
@@ -14578,7 +14578,7 @@
             <a:hlinkClick r:id="" action="ppaction://media"/>
             <a:extLst>
               <a:ext uri="{FF2B5EF4-FFF2-40B4-BE49-F238E27FC236}">
-                <a16:creationId xmlns:a16="http://schemas.microsoft.com/office/drawing/2014/main" id="{1BF387C7-C76A-E6A4-A5F1-0A1C259F836B}"/>
+                <a16:creationId xmlns:a16="http://schemas.microsoft.com/office/drawing/2014/main" id="{C4079EE2-C34D-8391-025E-20060C225C08}"/>
               </a:ext>
             </a:extLst>
           </p:cNvPr>
@@ -14594,7 +14594,7 @@
                     <p:ext uri="{3AFAAA56-56D3-431D-BCD4-E75A35582382}">
                       <p173:tracksInfo xmlns:p173="http://schemas.microsoft.com/office/powerpoint/2017/3/main" displayLoc="slide">
                         <p173:trackLst>
-                          <p173:track id="{81156983-E40C-4B43-A3E5-74C9445ECBAE}" label="English (captions)" lang="en-US" r:embed="rId7"/>
+                          <p173:track id="{CB51181D-B7BC-4632-9363-8BFDE16EF300}" label="English (captions)" lang="en-US" r:embed="rId7"/>
                         </p173:trackLst>
                       </p173:tracksInfo>
                     </p:ext>
@@ -14612,7 +14612,7 @@
         </p:blipFill>
         <p:spPr>
           <a:xfrm>
-            <a:off x="127000" y="6350000"/>
+            <a:off x="12446000" y="127000"/>
             <a:ext cx="304800" cy="304800"/>
           </a:xfrm>
           <a:prstGeom prst="rect">
@@ -15998,7 +15998,7 @@
             <a:hlinkClick r:id="" action="ppaction://media"/>
             <a:extLst>
               <a:ext uri="{FF2B5EF4-FFF2-40B4-BE49-F238E27FC236}">
-                <a16:creationId xmlns:a16="http://schemas.microsoft.com/office/drawing/2014/main" id="{427E6102-203E-17A5-F54F-14B55B89D5B6}"/>
+                <a16:creationId xmlns:a16="http://schemas.microsoft.com/office/drawing/2014/main" id="{69B6AEFF-4998-49C5-5F53-B7487C3475FA}"/>
               </a:ext>
             </a:extLst>
           </p:cNvPr>
@@ -16014,7 +16014,7 @@
                     <p:ext uri="{3AFAAA56-56D3-431D-BCD4-E75A35582382}">
                       <p173:tracksInfo xmlns:p173="http://schemas.microsoft.com/office/powerpoint/2017/3/main" displayLoc="slide">
                         <p173:trackLst>
-                          <p173:track id="{C77BCF07-080C-40A3-91AB-59F9BB8F1E5D}" label="English (captions)" lang="en-US" r:embed="rId6"/>
+                          <p173:track id="{D40DBF36-CDBF-4822-B8CF-38C186251142}" label="English (captions)" lang="en-US" r:embed="rId6"/>
                         </p173:trackLst>
                       </p173:tracksInfo>
                     </p:ext>
@@ -16032,7 +16032,7 @@
         </p:blipFill>
         <p:spPr>
           <a:xfrm>
-            <a:off x="127000" y="6350000"/>
+            <a:off x="12446000" y="127000"/>
             <a:ext cx="304800" cy="304800"/>
           </a:xfrm>
           <a:prstGeom prst="rect">
@@ -16901,7 +16901,7 @@
             <a:hlinkClick r:id="" action="ppaction://media"/>
             <a:extLst>
               <a:ext uri="{FF2B5EF4-FFF2-40B4-BE49-F238E27FC236}">
-                <a16:creationId xmlns:a16="http://schemas.microsoft.com/office/drawing/2014/main" id="{B46271C3-E71A-BCA7-3958-40A9B835E736}"/>
+                <a16:creationId xmlns:a16="http://schemas.microsoft.com/office/drawing/2014/main" id="{37A178D8-A574-90E0-39F6-61D71716B37A}"/>
               </a:ext>
             </a:extLst>
           </p:cNvPr>
@@ -16917,7 +16917,7 @@
                     <p:ext uri="{3AFAAA56-56D3-431D-BCD4-E75A35582382}">
                       <p173:tracksInfo xmlns:p173="http://schemas.microsoft.com/office/powerpoint/2017/3/main" displayLoc="slide">
                         <p173:trackLst>
-                          <p173:track id="{5CD4FF22-93AF-40A0-B90B-6990C09CA01A}" label="English (captions)" lang="en-US" r:embed="rId6"/>
+                          <p173:track id="{DD3C0B1A-CFDC-4496-BE25-EF68DA782062}" label="English (captions)" lang="en-US" r:embed="rId6"/>
                         </p173:trackLst>
                       </p173:tracksInfo>
                     </p:ext>
@@ -16935,7 +16935,7 @@
         </p:blipFill>
         <p:spPr>
           <a:xfrm>
-            <a:off x="127000" y="6350000"/>
+            <a:off x="12446000" y="127000"/>
             <a:ext cx="304800" cy="304800"/>
           </a:xfrm>
           <a:prstGeom prst="rect">
@@ -17933,7 +17933,7 @@
             <a:hlinkClick r:id="" action="ppaction://media"/>
             <a:extLst>
               <a:ext uri="{FF2B5EF4-FFF2-40B4-BE49-F238E27FC236}">
-                <a16:creationId xmlns:a16="http://schemas.microsoft.com/office/drawing/2014/main" id="{8A78D337-574B-9CA7-EAAF-6DAA1DF5CA70}"/>
+                <a16:creationId xmlns:a16="http://schemas.microsoft.com/office/drawing/2014/main" id="{8660590C-BAAB-E351-D857-EF7036918A1C}"/>
               </a:ext>
             </a:extLst>
           </p:cNvPr>
@@ -17949,7 +17949,7 @@
                     <p:ext uri="{3AFAAA56-56D3-431D-BCD4-E75A35582382}">
                       <p173:tracksInfo xmlns:p173="http://schemas.microsoft.com/office/powerpoint/2017/3/main" displayLoc="slide">
                         <p173:trackLst>
-                          <p173:track id="{12D7AEF3-C728-4BD9-92F7-0CA67EB2543E}" label="English (captions)" lang="en-US" r:embed="rId6"/>
+                          <p173:track id="{279DF863-4C68-48C3-BC52-F03B48ED0610}" label="English (captions)" lang="en-US" r:embed="rId6"/>
                         </p173:trackLst>
                       </p173:tracksInfo>
                     </p:ext>
@@ -17967,7 +17967,7 @@
         </p:blipFill>
         <p:spPr>
           <a:xfrm>
-            <a:off x="127000" y="6350000"/>
+            <a:off x="12446000" y="127000"/>
             <a:ext cx="304800" cy="304800"/>
           </a:xfrm>
           <a:prstGeom prst="rect">
